--- a/Day06-SQLAlchemy-and-API-Docs/Day06_Deck_SQLAlchemy_and_API_Docs.pptx
+++ b/Day06-SQLAlchemy-and-API-Docs/Day06_Deck_SQLAlchemy_and_API_Docs.pptx
@@ -4635,13 +4635,13 @@
           <a:noFill/>
         </p:spPr>
         <p:txBody>
-          <a:bodyPr wrap="square" lIns="0" rIns="0" tIns="0" bIns="0" anchor="t">
-            <a:spAutoFit/>
-          </a:bodyPr>
-          <a:lstStyle/>
-          <a:p>
-            <a:r>
-              <a:rPr sz="962" b="0" i="0">
+          <a:bodyPr wrap="none" lIns="0" rIns="0" tIns="0" bIns="0" anchor="t">
+            <a:spAutoFit/>
+          </a:bodyPr>
+          <a:lstStyle/>
+          <a:p>
+            <a:r>
+              <a:rPr sz="846" b="0" i="0">
                 <a:solidFill>
                   <a:srgbClr val="EAF7F5"/>
                 </a:solidFill>
@@ -4652,7 +4652,7 @@
           </a:p>
           <a:p>
             <a:r>
-              <a:rPr sz="962" b="0" i="0">
+              <a:rPr sz="846" b="0" i="0">
                 <a:solidFill>
                   <a:srgbClr val="EAF7F5"/>
                 </a:solidFill>
@@ -4663,7 +4663,7 @@
           </a:p>
           <a:p>
             <a:r>
-              <a:rPr sz="962" b="0" i="0">
+              <a:rPr sz="846" b="0" i="0">
                 <a:solidFill>
                   <a:srgbClr val="EAF7F5"/>
                 </a:solidFill>
@@ -4674,7 +4674,7 @@
           </a:p>
           <a:p>
             <a:r>
-              <a:rPr sz="962" b="0" i="0">
+              <a:rPr sz="846" b="0" i="0">
                 <a:solidFill>
                   <a:srgbClr val="EAF7F5"/>
                 </a:solidFill>
@@ -4685,7 +4685,7 @@
           </a:p>
           <a:p>
             <a:r>
-              <a:rPr sz="962" b="0" i="0">
+              <a:rPr sz="846" b="0" i="0">
                 <a:solidFill>
                   <a:srgbClr val="EAF7F5"/>
                 </a:solidFill>
@@ -4696,7 +4696,7 @@
           </a:p>
           <a:p>
             <a:r>
-              <a:rPr sz="962" b="0" i="0">
+              <a:rPr sz="846" b="0" i="0">
                 <a:solidFill>
                   <a:srgbClr val="EAF7F5"/>
                 </a:solidFill>
@@ -4707,7 +4707,7 @@
           </a:p>
           <a:p>
             <a:r>
-              <a:rPr sz="962" b="0" i="0">
+              <a:rPr sz="846" b="0" i="0">
                 <a:solidFill>
                   <a:srgbClr val="EAF7F5"/>
                 </a:solidFill>
@@ -4718,7 +4718,7 @@
           </a:p>
           <a:p>
             <a:r>
-              <a:rPr sz="962" b="0" i="0">
+              <a:rPr sz="846" b="0" i="0">
                 <a:solidFill>
                   <a:srgbClr val="EAF7F5"/>
                 </a:solidFill>
@@ -4729,7 +4729,7 @@
           </a:p>
           <a:p>
             <a:r>
-              <a:rPr sz="962" b="0" i="0">
+              <a:rPr sz="846" b="0" i="0">
                 <a:solidFill>
                   <a:srgbClr val="EAF7F5"/>
                 </a:solidFill>
@@ -4740,7 +4740,7 @@
           </a:p>
           <a:p>
             <a:r>
-              <a:rPr sz="962" b="0" i="0">
+              <a:rPr sz="846" b="0" i="0">
                 <a:solidFill>
                   <a:srgbClr val="EAF7F5"/>
                 </a:solidFill>
@@ -4751,7 +4751,7 @@
           </a:p>
           <a:p>
             <a:r>
-              <a:rPr sz="962" b="0" i="0">
+              <a:rPr sz="846" b="0" i="0">
                 <a:solidFill>
                   <a:srgbClr val="EAF7F5"/>
                 </a:solidFill>
@@ -4762,7 +4762,7 @@
           </a:p>
           <a:p>
             <a:r>
-              <a:rPr sz="962" b="0" i="0">
+              <a:rPr sz="846" b="0" i="0">
                 <a:solidFill>
                   <a:srgbClr val="EAF7F5"/>
                 </a:solidFill>
@@ -4773,7 +4773,7 @@
           </a:p>
           <a:p>
             <a:r>
-              <a:rPr sz="962" b="0" i="0">
+              <a:rPr sz="846" b="0" i="0">
                 <a:solidFill>
                   <a:srgbClr val="EAF7F5"/>
                 </a:solidFill>
@@ -4784,7 +4784,7 @@
           </a:p>
           <a:p>
             <a:r>
-              <a:rPr sz="962" b="0" i="0">
+              <a:rPr sz="846" b="0" i="0">
                 <a:solidFill>
                   <a:srgbClr val="EAF7F5"/>
                 </a:solidFill>
@@ -4795,7 +4795,7 @@
           </a:p>
           <a:p>
             <a:r>
-              <a:rPr sz="962" b="0" i="0">
+              <a:rPr sz="846" b="0" i="0">
                 <a:solidFill>
                   <a:srgbClr val="EAF7F5"/>
                 </a:solidFill>
@@ -5083,13 +5083,13 @@
           <a:noFill/>
         </p:spPr>
         <p:txBody>
-          <a:bodyPr wrap="square" lIns="0" rIns="0" tIns="0" bIns="0" anchor="t">
-            <a:spAutoFit/>
-          </a:bodyPr>
-          <a:lstStyle/>
-          <a:p>
-            <a:r>
-              <a:rPr sz="1133" b="0" i="0">
+          <a:bodyPr wrap="none" lIns="0" rIns="0" tIns="0" bIns="0" anchor="t">
+            <a:spAutoFit/>
+          </a:bodyPr>
+          <a:lstStyle/>
+          <a:p>
+            <a:r>
+              <a:rPr sz="997" b="0" i="0">
                 <a:solidFill>
                   <a:srgbClr val="EAF7F5"/>
                 </a:solidFill>
@@ -5100,7 +5100,7 @@
           </a:p>
           <a:p>
             <a:r>
-              <a:rPr sz="1133" b="0" i="0">
+              <a:rPr sz="997" b="0" i="0">
                 <a:solidFill>
                   <a:srgbClr val="EAF7F5"/>
                 </a:solidFill>
@@ -5111,7 +5111,7 @@
           </a:p>
           <a:p>
             <a:r>
-              <a:rPr sz="1133" b="0" i="0">
+              <a:rPr sz="997" b="0" i="0">
                 <a:solidFill>
                   <a:srgbClr val="EAF7F5"/>
                 </a:solidFill>
@@ -5122,7 +5122,7 @@
           </a:p>
           <a:p>
             <a:r>
-              <a:rPr sz="1133" b="0" i="0">
+              <a:rPr sz="997" b="0" i="0">
                 <a:solidFill>
                   <a:srgbClr val="EAF7F5"/>
                 </a:solidFill>
@@ -5133,7 +5133,7 @@
           </a:p>
           <a:p>
             <a:r>
-              <a:rPr sz="1133" b="0" i="0">
+              <a:rPr sz="997" b="0" i="0">
                 <a:solidFill>
                   <a:srgbClr val="EAF7F5"/>
                 </a:solidFill>
@@ -5144,7 +5144,7 @@
           </a:p>
           <a:p>
             <a:r>
-              <a:rPr sz="1133" b="0" i="0">
+              <a:rPr sz="997" b="0" i="0">
                 <a:solidFill>
                   <a:srgbClr val="EAF7F5"/>
                 </a:solidFill>
@@ -5155,7 +5155,7 @@
           </a:p>
           <a:p>
             <a:r>
-              <a:rPr sz="1133" b="0" i="0">
+              <a:rPr sz="997" b="0" i="0">
                 <a:solidFill>
                   <a:srgbClr val="EAF7F5"/>
                 </a:solidFill>
@@ -5166,7 +5166,7 @@
           </a:p>
           <a:p>
             <a:r>
-              <a:rPr sz="1133" b="0" i="0">
+              <a:rPr sz="997" b="0" i="0">
                 <a:solidFill>
                   <a:srgbClr val="EAF7F5"/>
                 </a:solidFill>
@@ -5177,7 +5177,7 @@
           </a:p>
           <a:p>
             <a:r>
-              <a:rPr sz="1133" b="0" i="0">
+              <a:rPr sz="997" b="0" i="0">
                 <a:solidFill>
                   <a:srgbClr val="EAF7F5"/>
                 </a:solidFill>
@@ -5465,13 +5465,13 @@
           <a:noFill/>
         </p:spPr>
         <p:txBody>
-          <a:bodyPr wrap="square" lIns="0" rIns="0" tIns="0" bIns="0" anchor="t">
-            <a:spAutoFit/>
-          </a:bodyPr>
-          <a:lstStyle/>
-          <a:p>
-            <a:r>
-              <a:rPr sz="1186" b="0" i="0">
+          <a:bodyPr wrap="none" lIns="0" rIns="0" tIns="0" bIns="0" anchor="t">
+            <a:spAutoFit/>
+          </a:bodyPr>
+          <a:lstStyle/>
+          <a:p>
+            <a:r>
+              <a:rPr sz="1043" b="0" i="0">
                 <a:solidFill>
                   <a:srgbClr val="EAF7F5"/>
                 </a:solidFill>
@@ -5482,7 +5482,7 @@
           </a:p>
           <a:p>
             <a:r>
-              <a:rPr sz="1186" b="0" i="0">
+              <a:rPr sz="1043" b="0" i="0">
                 <a:solidFill>
                   <a:srgbClr val="EAF7F5"/>
                 </a:solidFill>
@@ -5493,7 +5493,7 @@
           </a:p>
           <a:p>
             <a:r>
-              <a:rPr sz="1186" b="0" i="0">
+              <a:rPr sz="1043" b="0" i="0">
                 <a:solidFill>
                   <a:srgbClr val="EAF7F5"/>
                 </a:solidFill>
@@ -5504,7 +5504,7 @@
           </a:p>
           <a:p>
             <a:r>
-              <a:rPr sz="1186" b="0" i="0">
+              <a:rPr sz="1043" b="0" i="0">
                 <a:solidFill>
                   <a:srgbClr val="EAF7F5"/>
                 </a:solidFill>
@@ -5515,7 +5515,7 @@
           </a:p>
           <a:p>
             <a:r>
-              <a:rPr sz="1186" b="0" i="0">
+              <a:rPr sz="1043" b="0" i="0">
                 <a:solidFill>
                   <a:srgbClr val="EAF7F5"/>
                 </a:solidFill>
@@ -5526,7 +5526,7 @@
           </a:p>
           <a:p>
             <a:r>
-              <a:rPr sz="1186" b="0" i="0">
+              <a:rPr sz="1043" b="0" i="0">
                 <a:solidFill>
                   <a:srgbClr val="EAF7F5"/>
                 </a:solidFill>
@@ -5537,7 +5537,7 @@
           </a:p>
           <a:p>
             <a:r>
-              <a:rPr sz="1186" b="0" i="0">
+              <a:rPr sz="1043" b="0" i="0">
                 <a:solidFill>
                   <a:srgbClr val="EAF7F5"/>
                 </a:solidFill>
@@ -5548,7 +5548,7 @@
           </a:p>
           <a:p>
             <a:r>
-              <a:rPr sz="1186" b="0" i="0">
+              <a:rPr sz="1043" b="0" i="0">
                 <a:solidFill>
                   <a:srgbClr val="EAF7F5"/>
                 </a:solidFill>
@@ -5559,7 +5559,7 @@
           </a:p>
           <a:p>
             <a:r>
-              <a:rPr sz="1186" b="0" i="0">
+              <a:rPr sz="1043" b="0" i="0">
                 <a:solidFill>
                   <a:srgbClr val="EAF7F5"/>
                 </a:solidFill>
@@ -7538,13 +7538,13 @@
           <a:noFill/>
         </p:spPr>
         <p:txBody>
-          <a:bodyPr wrap="square" lIns="0" rIns="0" tIns="0" bIns="0" anchor="t">
-            <a:spAutoFit/>
-          </a:bodyPr>
-          <a:lstStyle/>
-          <a:p>
-            <a:r>
-              <a:rPr sz="1186" b="0" i="0">
+          <a:bodyPr wrap="none" lIns="0" rIns="0" tIns="0" bIns="0" anchor="t">
+            <a:spAutoFit/>
+          </a:bodyPr>
+          <a:lstStyle/>
+          <a:p>
+            <a:r>
+              <a:rPr sz="1043" b="0" i="0">
                 <a:solidFill>
                   <a:srgbClr val="EAF7F5"/>
                 </a:solidFill>
@@ -7555,7 +7555,7 @@
           </a:p>
           <a:p>
             <a:r>
-              <a:rPr sz="1186" b="0" i="0">
+              <a:rPr sz="1043" b="0" i="0">
                 <a:solidFill>
                   <a:srgbClr val="EAF7F5"/>
                 </a:solidFill>
@@ -7566,7 +7566,7 @@
           </a:p>
           <a:p>
             <a:r>
-              <a:rPr sz="1186" b="0" i="0">
+              <a:rPr sz="1043" b="0" i="0">
                 <a:solidFill>
                   <a:srgbClr val="EAF7F5"/>
                 </a:solidFill>
@@ -7577,7 +7577,7 @@
           </a:p>
           <a:p>
             <a:r>
-              <a:rPr sz="1186" b="0" i="0">
+              <a:rPr sz="1043" b="0" i="0">
                 <a:solidFill>
                   <a:srgbClr val="EAF7F5"/>
                 </a:solidFill>
@@ -7588,7 +7588,7 @@
           </a:p>
           <a:p>
             <a:r>
-              <a:rPr sz="1186" b="0" i="0">
+              <a:rPr sz="1043" b="0" i="0">
                 <a:solidFill>
                   <a:srgbClr val="EAF7F5"/>
                 </a:solidFill>
@@ -7599,7 +7599,7 @@
           </a:p>
           <a:p>
             <a:r>
-              <a:rPr sz="1186" b="0" i="0">
+              <a:rPr sz="1043" b="0" i="0">
                 <a:solidFill>
                   <a:srgbClr val="EAF7F5"/>
                 </a:solidFill>
@@ -7610,7 +7610,7 @@
           </a:p>
           <a:p>
             <a:r>
-              <a:rPr sz="1186" b="0" i="0">
+              <a:rPr sz="1043" b="0" i="0">
                 <a:solidFill>
                   <a:srgbClr val="EAF7F5"/>
                 </a:solidFill>
@@ -7621,7 +7621,7 @@
           </a:p>
           <a:p>
             <a:r>
-              <a:rPr sz="1186" b="0" i="0">
+              <a:rPr sz="1043" b="0" i="0">
                 <a:solidFill>
                   <a:srgbClr val="EAF7F5"/>
                 </a:solidFill>
@@ -7632,7 +7632,7 @@
           </a:p>
           <a:p>
             <a:r>
-              <a:rPr sz="1186" b="0" i="0">
+              <a:rPr sz="1043" b="0" i="0">
                 <a:solidFill>
                   <a:srgbClr val="EAF7F5"/>
                 </a:solidFill>
@@ -7643,7 +7643,7 @@
           </a:p>
           <a:p>
             <a:r>
-              <a:rPr sz="1186" b="0" i="0">
+              <a:rPr sz="1043" b="0" i="0">
                 <a:solidFill>
                   <a:srgbClr val="EAF7F5"/>
                 </a:solidFill>
@@ -7654,7 +7654,7 @@
           </a:p>
           <a:p>
             <a:r>
-              <a:rPr sz="1186" b="0" i="0">
+              <a:rPr sz="1043" b="0" i="0">
                 <a:solidFill>
                   <a:srgbClr val="EAF7F5"/>
                 </a:solidFill>
@@ -7665,7 +7665,7 @@
           </a:p>
           <a:p>
             <a:r>
-              <a:rPr sz="1186" b="0" i="0">
+              <a:rPr sz="1043" b="0" i="0">
                 <a:solidFill>
                   <a:srgbClr val="EAF7F5"/>
                 </a:solidFill>
@@ -7676,7 +7676,7 @@
           </a:p>
           <a:p>
             <a:r>
-              <a:rPr sz="1186" b="0" i="0">
+              <a:rPr sz="1043" b="0" i="0">
                 <a:solidFill>
                   <a:srgbClr val="EAF7F5"/>
                 </a:solidFill>
@@ -7687,7 +7687,7 @@
           </a:p>
           <a:p>
             <a:r>
-              <a:rPr sz="1186" b="0" i="0">
+              <a:rPr sz="1043" b="0" i="0">
                 <a:solidFill>
                   <a:srgbClr val="EAF7F5"/>
                 </a:solidFill>
@@ -9872,13 +9872,13 @@
           <a:noFill/>
         </p:spPr>
         <p:txBody>
-          <a:bodyPr wrap="square" lIns="0" rIns="0" tIns="0" bIns="0" anchor="t">
-            <a:spAutoFit/>
-          </a:bodyPr>
-          <a:lstStyle/>
-          <a:p>
-            <a:r>
-              <a:rPr sz="1159" b="0" i="0">
+          <a:bodyPr wrap="none" lIns="0" rIns="0" tIns="0" bIns="0" anchor="t">
+            <a:spAutoFit/>
+          </a:bodyPr>
+          <a:lstStyle/>
+          <a:p>
+            <a:r>
+              <a:rPr sz="1020" b="0" i="0">
                 <a:solidFill>
                   <a:srgbClr val="EAF7F5"/>
                 </a:solidFill>
@@ -9889,7 +9889,7 @@
           </a:p>
           <a:p>
             <a:r>
-              <a:rPr sz="1159" b="0" i="0">
+              <a:rPr sz="1020" b="0" i="0">
                 <a:solidFill>
                   <a:srgbClr val="EAF7F5"/>
                 </a:solidFill>
@@ -9900,7 +9900,7 @@
           </a:p>
           <a:p>
             <a:r>
-              <a:rPr sz="1159" b="0" i="0">
+              <a:rPr sz="1020" b="0" i="0">
                 <a:solidFill>
                   <a:srgbClr val="EAF7F5"/>
                 </a:solidFill>
@@ -9911,7 +9911,7 @@
           </a:p>
           <a:p>
             <a:r>
-              <a:rPr sz="1159" b="0" i="0">
+              <a:rPr sz="1020" b="0" i="0">
                 <a:solidFill>
                   <a:srgbClr val="EAF7F5"/>
                 </a:solidFill>
@@ -9922,7 +9922,7 @@
           </a:p>
           <a:p>
             <a:r>
-              <a:rPr sz="1159" b="0" i="0">
+              <a:rPr sz="1020" b="0" i="0">
                 <a:solidFill>
                   <a:srgbClr val="EAF7F5"/>
                 </a:solidFill>
@@ -9933,7 +9933,7 @@
           </a:p>
           <a:p>
             <a:r>
-              <a:rPr sz="1159" b="0" i="0">
+              <a:rPr sz="1020" b="0" i="0">
                 <a:solidFill>
                   <a:srgbClr val="EAF7F5"/>
                 </a:solidFill>
@@ -9944,7 +9944,7 @@
           </a:p>
           <a:p>
             <a:r>
-              <a:rPr sz="1159" b="0" i="0">
+              <a:rPr sz="1020" b="0" i="0">
                 <a:solidFill>
                   <a:srgbClr val="EAF7F5"/>
                 </a:solidFill>
@@ -9955,7 +9955,7 @@
           </a:p>
           <a:p>
             <a:r>
-              <a:rPr sz="1159" b="0" i="0">
+              <a:rPr sz="1020" b="0" i="0">
                 <a:solidFill>
                   <a:srgbClr val="EAF7F5"/>
                 </a:solidFill>
@@ -9966,7 +9966,7 @@
           </a:p>
           <a:p>
             <a:r>
-              <a:rPr sz="1159" b="0" i="0">
+              <a:rPr sz="1020" b="0" i="0">
                 <a:solidFill>
                   <a:srgbClr val="EAF7F5"/>
                 </a:solidFill>
@@ -9977,7 +9977,7 @@
           </a:p>
           <a:p>
             <a:r>
-              <a:rPr sz="1159" b="0" i="0">
+              <a:rPr sz="1020" b="0" i="0">
                 <a:solidFill>
                   <a:srgbClr val="EAF7F5"/>
                 </a:solidFill>
@@ -9988,7 +9988,7 @@
           </a:p>
           <a:p>
             <a:r>
-              <a:rPr sz="1159" b="0" i="0">
+              <a:rPr sz="1020" b="0" i="0">
                 <a:solidFill>
                   <a:srgbClr val="EAF7F5"/>
                 </a:solidFill>
@@ -9999,7 +9999,7 @@
           </a:p>
           <a:p>
             <a:r>
-              <a:rPr sz="1159" b="0" i="0">
+              <a:rPr sz="1020" b="0" i="0">
                 <a:solidFill>
                   <a:srgbClr val="EAF7F5"/>
                 </a:solidFill>
@@ -10010,7 +10010,7 @@
           </a:p>
           <a:p>
             <a:r>
-              <a:rPr sz="1159" b="0" i="0">
+              <a:rPr sz="1020" b="0" i="0">
                 <a:solidFill>
                   <a:srgbClr val="EAF7F5"/>
                 </a:solidFill>
@@ -16259,13 +16259,13 @@
           <a:noFill/>
         </p:spPr>
         <p:txBody>
-          <a:bodyPr wrap="square" lIns="0" rIns="0" tIns="0" bIns="0" anchor="t">
-            <a:spAutoFit/>
-          </a:bodyPr>
-          <a:lstStyle/>
-          <a:p>
-            <a:r>
-              <a:rPr sz="962" b="0" i="0">
+          <a:bodyPr wrap="none" lIns="0" rIns="0" tIns="0" bIns="0" anchor="t">
+            <a:spAutoFit/>
+          </a:bodyPr>
+          <a:lstStyle/>
+          <a:p>
+            <a:r>
+              <a:rPr sz="846" b="0" i="0">
                 <a:solidFill>
                   <a:srgbClr val="EAF7F5"/>
                 </a:solidFill>
@@ -16276,7 +16276,7 @@
           </a:p>
           <a:p>
             <a:r>
-              <a:rPr sz="962" b="0" i="0">
+              <a:rPr sz="846" b="0" i="0">
                 <a:solidFill>
                   <a:srgbClr val="EAF7F5"/>
                 </a:solidFill>
@@ -16287,7 +16287,7 @@
           </a:p>
           <a:p>
             <a:r>
-              <a:rPr sz="962" b="0" i="0">
+              <a:rPr sz="846" b="0" i="0">
                 <a:solidFill>
                   <a:srgbClr val="EAF7F5"/>
                 </a:solidFill>
@@ -16298,7 +16298,7 @@
           </a:p>
           <a:p>
             <a:r>
-              <a:rPr sz="962" b="0" i="0">
+              <a:rPr sz="846" b="0" i="0">
                 <a:solidFill>
                   <a:srgbClr val="EAF7F5"/>
                 </a:solidFill>
@@ -16309,7 +16309,7 @@
           </a:p>
           <a:p>
             <a:r>
-              <a:rPr sz="962" b="0" i="0">
+              <a:rPr sz="846" b="0" i="0">
                 <a:solidFill>
                   <a:srgbClr val="EAF7F5"/>
                 </a:solidFill>
@@ -16320,7 +16320,7 @@
           </a:p>
           <a:p>
             <a:r>
-              <a:rPr sz="962" b="0" i="0">
+              <a:rPr sz="846" b="0" i="0">
                 <a:solidFill>
                   <a:srgbClr val="EAF7F5"/>
                 </a:solidFill>
@@ -16331,7 +16331,7 @@
           </a:p>
           <a:p>
             <a:r>
-              <a:rPr sz="962" b="0" i="0">
+              <a:rPr sz="846" b="0" i="0">
                 <a:solidFill>
                   <a:srgbClr val="EAF7F5"/>
                 </a:solidFill>
@@ -16342,7 +16342,7 @@
           </a:p>
           <a:p>
             <a:r>
-              <a:rPr sz="962" b="0" i="0">
+              <a:rPr sz="846" b="0" i="0">
                 <a:solidFill>
                   <a:srgbClr val="EAF7F5"/>
                 </a:solidFill>
@@ -16353,7 +16353,7 @@
           </a:p>
           <a:p>
             <a:r>
-              <a:rPr sz="962" b="0" i="0">
+              <a:rPr sz="846" b="0" i="0">
                 <a:solidFill>
                   <a:srgbClr val="EAF7F5"/>
                 </a:solidFill>
@@ -16364,7 +16364,7 @@
           </a:p>
           <a:p>
             <a:r>
-              <a:rPr sz="962" b="0" i="0">
+              <a:rPr sz="846" b="0" i="0">
                 <a:solidFill>
                   <a:srgbClr val="EAF7F5"/>
                 </a:solidFill>
@@ -16375,7 +16375,7 @@
           </a:p>
           <a:p>
             <a:r>
-              <a:rPr sz="962" b="0" i="0">
+              <a:rPr sz="846" b="0" i="0">
                 <a:solidFill>
                   <a:srgbClr val="EAF7F5"/>
                 </a:solidFill>
@@ -16386,7 +16386,7 @@
           </a:p>
           <a:p>
             <a:r>
-              <a:rPr sz="962" b="0" i="0">
+              <a:rPr sz="846" b="0" i="0">
                 <a:solidFill>
                   <a:srgbClr val="EAF7F5"/>
                 </a:solidFill>
@@ -16397,7 +16397,7 @@
           </a:p>
           <a:p>
             <a:r>
-              <a:rPr sz="962" b="0" i="0">
+              <a:rPr sz="846" b="0" i="0">
                 <a:solidFill>
                   <a:srgbClr val="EAF7F5"/>
                 </a:solidFill>
@@ -16408,7 +16408,7 @@
           </a:p>
           <a:p>
             <a:r>
-              <a:rPr sz="962" b="0" i="0">
+              <a:rPr sz="846" b="0" i="0">
                 <a:solidFill>
                   <a:srgbClr val="EAF7F5"/>
                 </a:solidFill>
@@ -16419,7 +16419,7 @@
           </a:p>
           <a:p>
             <a:r>
-              <a:rPr sz="962" b="0" i="0">
+              <a:rPr sz="846" b="0" i="0">
                 <a:solidFill>
                   <a:srgbClr val="EAF7F5"/>
                 </a:solidFill>
@@ -17373,13 +17373,13 @@
           <a:noFill/>
         </p:spPr>
         <p:txBody>
-          <a:bodyPr wrap="square" lIns="0" rIns="0" tIns="0" bIns="0" anchor="t">
-            <a:spAutoFit/>
-          </a:bodyPr>
-          <a:lstStyle/>
-          <a:p>
-            <a:r>
-              <a:rPr sz="1307" b="0" i="0">
+          <a:bodyPr wrap="none" lIns="0" rIns="0" tIns="0" bIns="0" anchor="t">
+            <a:spAutoFit/>
+          </a:bodyPr>
+          <a:lstStyle/>
+          <a:p>
+            <a:r>
+              <a:rPr sz="1150" b="0" i="0">
                 <a:solidFill>
                   <a:srgbClr val="EAF7F5"/>
                 </a:solidFill>
@@ -17390,7 +17390,7 @@
           </a:p>
           <a:p>
             <a:r>
-              <a:rPr sz="1307" b="0" i="0">
+              <a:rPr sz="1150" b="0" i="0">
                 <a:solidFill>
                   <a:srgbClr val="EAF7F5"/>
                 </a:solidFill>
@@ -17401,7 +17401,7 @@
           </a:p>
           <a:p>
             <a:r>
-              <a:rPr sz="1307" b="0" i="0">
+              <a:rPr sz="1150" b="0" i="0">
                 <a:solidFill>
                   <a:srgbClr val="EAF7F5"/>
                 </a:solidFill>
@@ -17412,7 +17412,7 @@
           </a:p>
           <a:p>
             <a:r>
-              <a:rPr sz="1307" b="0" i="0">
+              <a:rPr sz="1150" b="0" i="0">
                 <a:solidFill>
                   <a:srgbClr val="EAF7F5"/>
                 </a:solidFill>
@@ -17423,7 +17423,7 @@
           </a:p>
           <a:p>
             <a:r>
-              <a:rPr sz="1307" b="0" i="0">
+              <a:rPr sz="1150" b="0" i="0">
                 <a:solidFill>
                   <a:srgbClr val="EAF7F5"/>
                 </a:solidFill>
@@ -17434,7 +17434,7 @@
           </a:p>
           <a:p>
             <a:r>
-              <a:rPr sz="1307" b="0" i="0">
+              <a:rPr sz="1150" b="0" i="0">
                 <a:solidFill>
                   <a:srgbClr val="EAF7F5"/>
                 </a:solidFill>
@@ -17445,7 +17445,7 @@
           </a:p>
           <a:p>
             <a:r>
-              <a:rPr sz="1307" b="0" i="0">
+              <a:rPr sz="1150" b="0" i="0">
                 <a:solidFill>
                   <a:srgbClr val="EAF7F5"/>
                 </a:solidFill>
@@ -17456,7 +17456,7 @@
           </a:p>
           <a:p>
             <a:r>
-              <a:rPr sz="1307" b="0" i="0">
+              <a:rPr sz="1150" b="0" i="0">
                 <a:solidFill>
                   <a:srgbClr val="EAF7F5"/>
                 </a:solidFill>
@@ -17467,7 +17467,7 @@
           </a:p>
           <a:p>
             <a:r>
-              <a:rPr sz="1307" b="0" i="0">
+              <a:rPr sz="1150" b="0" i="0">
                 <a:solidFill>
                   <a:srgbClr val="EAF7F5"/>
                 </a:solidFill>
@@ -17478,7 +17478,7 @@
           </a:p>
           <a:p>
             <a:r>
-              <a:rPr sz="1307" b="0" i="0">
+              <a:rPr sz="1150" b="0" i="0">
                 <a:solidFill>
                   <a:srgbClr val="EAF7F5"/>
                 </a:solidFill>
@@ -17489,7 +17489,7 @@
           </a:p>
           <a:p>
             <a:r>
-              <a:rPr sz="1307" b="0" i="0">
+              <a:rPr sz="1150" b="0" i="0">
                 <a:solidFill>
                   <a:srgbClr val="EAF7F5"/>
                 </a:solidFill>
@@ -17500,7 +17500,7 @@
           </a:p>
           <a:p>
             <a:r>
-              <a:rPr sz="1307" b="0" i="0">
+              <a:rPr sz="1150" b="0" i="0">
                 <a:solidFill>
                   <a:srgbClr val="EAF7F5"/>
                 </a:solidFill>
@@ -17511,7 +17511,7 @@
           </a:p>
           <a:p>
             <a:r>
-              <a:rPr sz="1307" b="0" i="0">
+              <a:rPr sz="1150" b="0" i="0">
                 <a:solidFill>
                   <a:srgbClr val="EAF7F5"/>
                 </a:solidFill>
